--- a/Presentation/APPLIANCES WORLD.pptx
+++ b/Presentation/APPLIANCES WORLD.pptx
@@ -1420,13 +1420,13 @@
   <p:clrMapOvr>
     <a:masterClrMapping/>
   </p:clrMapOvr>
-  <mc:AlternateContent xmlns:mc="http://schemas.openxmlformats.org/markup-compatibility/2006">
-    <mc:Choice xmlns:p14="http://schemas.microsoft.com/office/powerpoint/2010/main" Requires="p14">
+  <mc:AlternateContent xmlns:mc="http://schemas.openxmlformats.org/markup-compatibility/2006" xmlns:p14="http://schemas.microsoft.com/office/powerpoint/2010/main">
+    <mc:Choice Requires="p14">
       <p:transition spd="slow" p14:dur="1500">
         <p:split orient="vert"/>
       </p:transition>
     </mc:Choice>
-    <mc:Fallback>
+    <mc:Fallback xmlns="">
       <p:transition spd="slow">
         <p:split orient="vert"/>
       </p:transition>
@@ -2225,13 +2225,13 @@
   <p:clrMapOvr>
     <a:masterClrMapping/>
   </p:clrMapOvr>
-  <mc:AlternateContent xmlns:mc="http://schemas.openxmlformats.org/markup-compatibility/2006">
-    <mc:Choice xmlns:p14="http://schemas.microsoft.com/office/powerpoint/2010/main" Requires="p14">
+  <mc:AlternateContent xmlns:mc="http://schemas.openxmlformats.org/markup-compatibility/2006" xmlns:p14="http://schemas.microsoft.com/office/powerpoint/2010/main">
+    <mc:Choice Requires="p14">
       <p:transition spd="slow" p14:dur="1600">
         <p14:prism isInverted="1"/>
       </p:transition>
     </mc:Choice>
-    <mc:Fallback>
+    <mc:Fallback xmlns="">
       <p:transition spd="slow">
         <p:fade/>
       </p:transition>
@@ -3149,18 +3149,7 @@
                 <a:ea typeface="Calibri" pitchFamily="34" charset="-122"/>
                 <a:cs typeface="Calibri" pitchFamily="34" charset="-120"/>
               </a:rPr>
-              <a:t>Appliances World</a:t>
-            </a:r>
-            <a:r>
-              <a:rPr lang="en-US" sz="1500" dirty="0" smtClean="0">
-                <a:solidFill>
-                  <a:srgbClr val="B8C2D6"/>
-                </a:solidFill>
-                <a:latin typeface="Calibri" pitchFamily="34" charset="0"/>
-                <a:ea typeface="Calibri" pitchFamily="34" charset="-122"/>
-                <a:cs typeface="Calibri" pitchFamily="34" charset="-120"/>
-              </a:rPr>
-              <a:t> </a:t>
+              <a:t>Appliances World </a:t>
             </a:r>
             <a:r>
               <a:rPr lang="en-US" sz="1500" dirty="0">
@@ -3375,13 +3364,13 @@
   <p:clrMapOvr>
     <a:masterClrMapping/>
   </p:clrMapOvr>
-  <mc:AlternateContent xmlns:mc="http://schemas.openxmlformats.org/markup-compatibility/2006">
-    <mc:Choice xmlns:p14="http://schemas.microsoft.com/office/powerpoint/2010/main" Requires="p14">
+  <mc:AlternateContent xmlns:mc="http://schemas.openxmlformats.org/markup-compatibility/2006" xmlns:p14="http://schemas.microsoft.com/office/powerpoint/2010/main">
+    <mc:Choice Requires="p14">
       <p:transition spd="slow" p14:dur="1600">
         <p14:prism isInverted="1"/>
       </p:transition>
     </mc:Choice>
-    <mc:Fallback>
+    <mc:Fallback xmlns="">
       <p:transition spd="slow">
         <p:fade/>
       </p:transition>
@@ -4495,13 +4484,13 @@
   <p:clrMapOvr>
     <a:masterClrMapping/>
   </p:clrMapOvr>
-  <mc:AlternateContent xmlns:mc="http://schemas.openxmlformats.org/markup-compatibility/2006">
-    <mc:Choice xmlns:p14="http://schemas.microsoft.com/office/powerpoint/2010/main" Requires="p14">
+  <mc:AlternateContent xmlns:mc="http://schemas.openxmlformats.org/markup-compatibility/2006" xmlns:p14="http://schemas.microsoft.com/office/powerpoint/2010/main">
+    <mc:Choice Requires="p14">
       <p:transition spd="slow" p14:dur="1600">
         <p14:prism isInverted="1"/>
       </p:transition>
     </mc:Choice>
-    <mc:Fallback>
+    <mc:Fallback xmlns="">
       <p:transition spd="slow">
         <p:fade/>
       </p:transition>
@@ -6253,13 +6242,13 @@
   <p:clrMapOvr>
     <a:masterClrMapping/>
   </p:clrMapOvr>
-  <mc:AlternateContent xmlns:mc="http://schemas.openxmlformats.org/markup-compatibility/2006">
-    <mc:Choice xmlns:p14="http://schemas.microsoft.com/office/powerpoint/2010/main" Requires="p14">
+  <mc:AlternateContent xmlns:mc="http://schemas.openxmlformats.org/markup-compatibility/2006" xmlns:p14="http://schemas.microsoft.com/office/powerpoint/2010/main">
+    <mc:Choice Requires="p14">
       <p:transition spd="slow" p14:dur="1600">
         <p14:prism isInverted="1"/>
       </p:transition>
     </mc:Choice>
-    <mc:Fallback>
+    <mc:Fallback xmlns="">
       <p:transition spd="slow">
         <p:fade/>
       </p:transition>
@@ -7365,6 +7354,17 @@
               <a:buNone/>
             </a:pPr>
             <a:r>
+              <a:rPr lang="en-US" sz="1100" b="1" kern="0" spc="600" dirty="0" smtClean="0">
+                <a:solidFill>
+                  <a:srgbClr val="7FDBFF"/>
+                </a:solidFill>
+                <a:latin typeface="Calibri" pitchFamily="34" charset="0"/>
+                <a:ea typeface="Calibri" pitchFamily="34" charset="-122"/>
+                <a:cs typeface="Calibri" pitchFamily="34" charset="-120"/>
+              </a:rPr>
+              <a:t>04  </a:t>
+            </a:r>
+            <a:r>
               <a:rPr lang="en-US" sz="1100" b="1" kern="0" spc="600" dirty="0">
                 <a:solidFill>
                   <a:srgbClr val="7FDBFF"/>
@@ -7373,7 +7373,7 @@
                 <a:ea typeface="Calibri" pitchFamily="34" charset="-122"/>
                 <a:cs typeface="Calibri" pitchFamily="34" charset="-120"/>
               </a:rPr>
-              <a:t>05  ///  KEY FEATURES</a:t>
+              <a:t>///  KEY FEATURES</a:t>
             </a:r>
             <a:endParaRPr lang="en-US" sz="1100" dirty="0"/>
           </a:p>
@@ -7646,13 +7646,125 @@
       </p:sp>
       <p:sp>
         <p:nvSpPr>
-          <p:cNvPr id="14" name="Shape 11"/>
-          <p:cNvSpPr/>
-          <p:nvPr/>
-        </p:nvSpPr>
-        <p:spPr>
-          <a:xfrm>
-            <a:off x="548640" y="3630168"/>
+          <p:cNvPr id="15" name="Text 12"/>
+          <p:cNvSpPr/>
+          <p:nvPr/>
+        </p:nvSpPr>
+        <p:spPr>
+          <a:xfrm>
+            <a:off x="868680" y="3511296"/>
+            <a:ext cx="6400800" cy="292608"/>
+          </a:xfrm>
+          <a:prstGeom prst="rect">
+            <a:avLst/>
+          </a:prstGeom>
+          <a:noFill/>
+          <a:ln/>
+        </p:spPr>
+        <p:txBody>
+          <a:bodyPr wrap="square" rtlCol="0" anchor="ctr"/>
+          <a:lstStyle/>
+          <a:p>
+            <a:pPr marL="0" indent="0">
+              <a:buNone/>
+            </a:pPr>
+            <a:endParaRPr lang="en-US" sz="1400" dirty="0"/>
+          </a:p>
+        </p:txBody>
+      </p:sp>
+      <p:sp>
+        <p:nvSpPr>
+          <p:cNvPr id="16" name="Text 13"/>
+          <p:cNvSpPr/>
+          <p:nvPr/>
+        </p:nvSpPr>
+        <p:spPr>
+          <a:xfrm>
+            <a:off x="868680" y="3803904"/>
+            <a:ext cx="6400800" cy="365760"/>
+          </a:xfrm>
+          <a:prstGeom prst="rect">
+            <a:avLst/>
+          </a:prstGeom>
+          <a:noFill/>
+          <a:ln/>
+        </p:spPr>
+        <p:txBody>
+          <a:bodyPr wrap="square" rtlCol="0" anchor="ctr"/>
+          <a:lstStyle/>
+          <a:p>
+            <a:pPr marL="0" indent="0">
+              <a:buNone/>
+            </a:pPr>
+            <a:endParaRPr lang="en-US" sz="1100" dirty="0"/>
+          </a:p>
+        </p:txBody>
+      </p:sp>
+      <p:sp>
+        <p:nvSpPr>
+          <p:cNvPr id="18" name="Text 15"/>
+          <p:cNvSpPr/>
+          <p:nvPr/>
+        </p:nvSpPr>
+        <p:spPr>
+          <a:xfrm>
+            <a:off x="868680" y="4169664"/>
+            <a:ext cx="6400800" cy="292608"/>
+          </a:xfrm>
+          <a:prstGeom prst="rect">
+            <a:avLst/>
+          </a:prstGeom>
+          <a:noFill/>
+          <a:ln/>
+        </p:spPr>
+        <p:txBody>
+          <a:bodyPr wrap="square" rtlCol="0" anchor="ctr"/>
+          <a:lstStyle/>
+          <a:p>
+            <a:pPr marL="0" indent="0">
+              <a:buNone/>
+            </a:pPr>
+            <a:endParaRPr lang="en-US" sz="1400" dirty="0"/>
+          </a:p>
+        </p:txBody>
+      </p:sp>
+      <p:sp>
+        <p:nvSpPr>
+          <p:cNvPr id="19" name="Text 16"/>
+          <p:cNvSpPr/>
+          <p:nvPr/>
+        </p:nvSpPr>
+        <p:spPr>
+          <a:xfrm>
+            <a:off x="1038166" y="4635622"/>
+            <a:ext cx="6400800" cy="365760"/>
+          </a:xfrm>
+          <a:prstGeom prst="rect">
+            <a:avLst/>
+          </a:prstGeom>
+          <a:noFill/>
+          <a:ln/>
+        </p:spPr>
+        <p:txBody>
+          <a:bodyPr wrap="square" rtlCol="0" anchor="ctr"/>
+          <a:lstStyle/>
+          <a:p>
+            <a:pPr marL="0" indent="0">
+              <a:buNone/>
+            </a:pPr>
+            <a:endParaRPr lang="en-US" sz="1100" dirty="0"/>
+          </a:p>
+        </p:txBody>
+      </p:sp>
+      <p:sp>
+        <p:nvSpPr>
+          <p:cNvPr id="20" name="Shape 17"/>
+          <p:cNvSpPr/>
+          <p:nvPr/>
+        </p:nvSpPr>
+        <p:spPr>
+          <a:xfrm>
+            <a:off x="545485" y="3697524"/>
             <a:ext cx="109728" cy="109728"/>
           </a:xfrm>
           <a:prstGeom prst="ellipse">
@@ -7671,219 +7783,13 @@
       </p:sp>
       <p:sp>
         <p:nvSpPr>
-          <p:cNvPr id="15" name="Text 12"/>
-          <p:cNvSpPr/>
-          <p:nvPr/>
-        </p:nvSpPr>
-        <p:spPr>
-          <a:xfrm>
-            <a:off x="868680" y="3511296"/>
-            <a:ext cx="6400800" cy="292608"/>
-          </a:xfrm>
-          <a:prstGeom prst="rect">
-            <a:avLst/>
-          </a:prstGeom>
-          <a:noFill/>
-          <a:ln/>
-        </p:spPr>
-        <p:txBody>
-          <a:bodyPr wrap="square" rtlCol="0" anchor="ctr"/>
-          <a:lstStyle/>
-          <a:p>
-            <a:pPr marL="0" indent="0">
-              <a:buNone/>
-            </a:pPr>
-            <a:r>
-              <a:rPr lang="en-US" sz="1400" b="1" dirty="0">
-                <a:solidFill>
-                  <a:srgbClr val="FFFFFF"/>
-                </a:solidFill>
-                <a:latin typeface="Calibri" pitchFamily="34" charset="0"/>
-                <a:ea typeface="Calibri" pitchFamily="34" charset="-122"/>
-                <a:cs typeface="Calibri" pitchFamily="34" charset="-120"/>
-              </a:rPr>
-              <a:t>Secure Checkout</a:t>
-            </a:r>
-            <a:endParaRPr lang="en-US" sz="1400" dirty="0"/>
-          </a:p>
-        </p:txBody>
-      </p:sp>
-      <p:sp>
-        <p:nvSpPr>
-          <p:cNvPr id="16" name="Text 13"/>
-          <p:cNvSpPr/>
-          <p:nvPr/>
-        </p:nvSpPr>
-        <p:spPr>
-          <a:xfrm>
-            <a:off x="868680" y="3803904"/>
-            <a:ext cx="6400800" cy="365760"/>
-          </a:xfrm>
-          <a:prstGeom prst="rect">
-            <a:avLst/>
-          </a:prstGeom>
-          <a:noFill/>
-          <a:ln/>
-        </p:spPr>
-        <p:txBody>
-          <a:bodyPr wrap="square" rtlCol="0" anchor="ctr"/>
-          <a:lstStyle/>
-          <a:p>
-            <a:pPr marL="0" indent="0">
-              <a:buNone/>
-            </a:pPr>
-            <a:r>
-              <a:rPr lang="en-US" sz="1100" dirty="0">
-                <a:solidFill>
-                  <a:srgbClr val="B8C2D6"/>
-                </a:solidFill>
-                <a:latin typeface="Calibri" pitchFamily="34" charset="0"/>
-                <a:ea typeface="Calibri" pitchFamily="34" charset="-122"/>
-                <a:cs typeface="Calibri" pitchFamily="34" charset="-120"/>
-              </a:rPr>
-              <a:t>Multiple payment options with safe, encrypted transactions.</a:t>
-            </a:r>
-            <a:endParaRPr lang="en-US" sz="1100" dirty="0"/>
-          </a:p>
-        </p:txBody>
-      </p:sp>
-      <p:sp>
-        <p:nvSpPr>
-          <p:cNvPr id="17" name="Shape 14"/>
-          <p:cNvSpPr/>
-          <p:nvPr/>
-        </p:nvSpPr>
-        <p:spPr>
-          <a:xfrm>
-            <a:off x="548640" y="4288536"/>
-            <a:ext cx="109728" cy="109728"/>
-          </a:xfrm>
-          <a:prstGeom prst="ellipse">
-            <a:avLst/>
-          </a:prstGeom>
-          <a:solidFill>
-            <a:srgbClr val="7FDBFF"/>
-          </a:solidFill>
-          <a:ln w="12700">
-            <a:solidFill>
-              <a:srgbClr val="7FDBFF"/>
-            </a:solidFill>
-            <a:prstDash val="solid"/>
-          </a:ln>
-        </p:spPr>
-      </p:sp>
-      <p:sp>
-        <p:nvSpPr>
-          <p:cNvPr id="18" name="Text 15"/>
-          <p:cNvSpPr/>
-          <p:nvPr/>
-        </p:nvSpPr>
-        <p:spPr>
-          <a:xfrm>
-            <a:off x="868680" y="4169664"/>
-            <a:ext cx="6400800" cy="292608"/>
-          </a:xfrm>
-          <a:prstGeom prst="rect">
-            <a:avLst/>
-          </a:prstGeom>
-          <a:noFill/>
-          <a:ln/>
-        </p:spPr>
-        <p:txBody>
-          <a:bodyPr wrap="square" rtlCol="0" anchor="ctr"/>
-          <a:lstStyle/>
-          <a:p>
-            <a:pPr marL="0" indent="0">
-              <a:buNone/>
-            </a:pPr>
-            <a:r>
-              <a:rPr lang="en-US" sz="1400" b="1" dirty="0">
-                <a:solidFill>
-                  <a:srgbClr val="FFFFFF"/>
-                </a:solidFill>
-                <a:latin typeface="Calibri" pitchFamily="34" charset="0"/>
-                <a:ea typeface="Calibri" pitchFamily="34" charset="-122"/>
-                <a:cs typeface="Calibri" pitchFamily="34" charset="-120"/>
-              </a:rPr>
-              <a:t>Wishlist &amp; Compare</a:t>
-            </a:r>
-            <a:endParaRPr lang="en-US" sz="1400" dirty="0"/>
-          </a:p>
-        </p:txBody>
-      </p:sp>
-      <p:sp>
-        <p:nvSpPr>
-          <p:cNvPr id="19" name="Text 16"/>
-          <p:cNvSpPr/>
-          <p:nvPr/>
-        </p:nvSpPr>
-        <p:spPr>
-          <a:xfrm>
-            <a:off x="868680" y="4462272"/>
-            <a:ext cx="6400800" cy="365760"/>
-          </a:xfrm>
-          <a:prstGeom prst="rect">
-            <a:avLst/>
-          </a:prstGeom>
-          <a:noFill/>
-          <a:ln/>
-        </p:spPr>
-        <p:txBody>
-          <a:bodyPr wrap="square" rtlCol="0" anchor="ctr"/>
-          <a:lstStyle/>
-          <a:p>
-            <a:pPr marL="0" indent="0">
-              <a:buNone/>
-            </a:pPr>
-            <a:r>
-              <a:rPr lang="en-US" sz="1100" dirty="0">
-                <a:solidFill>
-                  <a:srgbClr val="B8C2D6"/>
-                </a:solidFill>
-                <a:latin typeface="Calibri" pitchFamily="34" charset="0"/>
-                <a:ea typeface="Calibri" pitchFamily="34" charset="-122"/>
-                <a:cs typeface="Calibri" pitchFamily="34" charset="-120"/>
-              </a:rPr>
-              <a:t>Save favourites and compare products side by side.</a:t>
-            </a:r>
-            <a:endParaRPr lang="en-US" sz="1100" dirty="0"/>
-          </a:p>
-        </p:txBody>
-      </p:sp>
-      <p:sp>
-        <p:nvSpPr>
-          <p:cNvPr id="20" name="Shape 17"/>
-          <p:cNvSpPr/>
-          <p:nvPr/>
-        </p:nvSpPr>
-        <p:spPr>
-          <a:xfrm>
-            <a:off x="548640" y="4946904"/>
-            <a:ext cx="109728" cy="109728"/>
-          </a:xfrm>
-          <a:prstGeom prst="ellipse">
-            <a:avLst/>
-          </a:prstGeom>
-          <a:solidFill>
-            <a:srgbClr val="7FDBFF"/>
-          </a:solidFill>
-          <a:ln w="12700">
-            <a:solidFill>
-              <a:srgbClr val="7FDBFF"/>
-            </a:solidFill>
-            <a:prstDash val="solid"/>
-          </a:ln>
-        </p:spPr>
-      </p:sp>
-      <p:sp>
-        <p:nvSpPr>
           <p:cNvPr id="21" name="Text 18"/>
           <p:cNvSpPr/>
           <p:nvPr/>
         </p:nvSpPr>
         <p:spPr>
           <a:xfrm>
-            <a:off x="868680" y="4828032"/>
+            <a:off x="868680" y="3575690"/>
             <a:ext cx="6400800" cy="292608"/>
           </a:xfrm>
           <a:prstGeom prst="rect">
@@ -7922,7 +7828,7 @@
         </p:nvSpPr>
         <p:spPr>
           <a:xfrm>
-            <a:off x="868680" y="5120640"/>
+            <a:off x="833907" y="3908867"/>
             <a:ext cx="6400800" cy="365760"/>
           </a:xfrm>
           <a:prstGeom prst="rect">
@@ -7961,7 +7867,7 @@
         </p:nvSpPr>
         <p:spPr>
           <a:xfrm>
-            <a:off x="548640" y="5605272"/>
+            <a:off x="542716" y="4407408"/>
             <a:ext cx="109728" cy="109728"/>
           </a:xfrm>
           <a:prstGeom prst="ellipse">
@@ -7986,7 +7892,7 @@
         </p:nvSpPr>
         <p:spPr>
           <a:xfrm>
-            <a:off x="868680" y="5486400"/>
+            <a:off x="833907" y="4301673"/>
             <a:ext cx="6400800" cy="292608"/>
           </a:xfrm>
           <a:prstGeom prst="rect">
@@ -8025,7 +7931,7 @@
         </p:nvSpPr>
         <p:spPr>
           <a:xfrm>
-            <a:off x="868680" y="5779008"/>
+            <a:off x="833907" y="4631629"/>
             <a:ext cx="6400800" cy="365760"/>
           </a:xfrm>
           <a:prstGeom prst="rect">
@@ -8100,13 +8006,13 @@
   <p:clrMapOvr>
     <a:masterClrMapping/>
   </p:clrMapOvr>
-  <mc:AlternateContent xmlns:mc="http://schemas.openxmlformats.org/markup-compatibility/2006">
-    <mc:Choice xmlns:p14="http://schemas.microsoft.com/office/powerpoint/2010/main" Requires="p14">
+  <mc:AlternateContent xmlns:mc="http://schemas.openxmlformats.org/markup-compatibility/2006" xmlns:p14="http://schemas.microsoft.com/office/powerpoint/2010/main">
+    <mc:Choice Requires="p14">
       <p:transition spd="slow" p14:dur="1600">
         <p14:prism isInverted="1"/>
       </p:transition>
     </mc:Choice>
-    <mc:Fallback>
+    <mc:Fallback xmlns="">
       <p:transition spd="slow">
         <p:fade/>
       </p:transition>
@@ -8728,6 +8634,17 @@
               <a:buNone/>
             </a:pPr>
             <a:r>
+              <a:rPr lang="en-US" sz="1100" b="1" kern="0" spc="600" dirty="0" smtClean="0">
+                <a:solidFill>
+                  <a:srgbClr val="7FDBFF"/>
+                </a:solidFill>
+                <a:latin typeface="Calibri" pitchFamily="34" charset="0"/>
+                <a:ea typeface="Calibri" pitchFamily="34" charset="-122"/>
+                <a:cs typeface="Calibri" pitchFamily="34" charset="-120"/>
+              </a:rPr>
+              <a:t>05  </a:t>
+            </a:r>
+            <a:r>
               <a:rPr lang="en-US" sz="1100" b="1" kern="0" spc="600" dirty="0">
                 <a:solidFill>
                   <a:srgbClr val="7FDBFF"/>
@@ -8736,7 +8653,7 @@
                 <a:ea typeface="Calibri" pitchFamily="34" charset="-122"/>
                 <a:cs typeface="Calibri" pitchFamily="34" charset="-120"/>
               </a:rPr>
-              <a:t>06  ///  BENEFITS FOR CUSTOMERS</a:t>
+              <a:t>///  BENEFITS FOR CUSTOMERS</a:t>
             </a:r>
             <a:endParaRPr lang="en-US" sz="1100" dirty="0"/>
           </a:p>
@@ -9688,13 +9605,13 @@
   <p:clrMapOvr>
     <a:masterClrMapping/>
   </p:clrMapOvr>
-  <mc:AlternateContent xmlns:mc="http://schemas.openxmlformats.org/markup-compatibility/2006">
-    <mc:Choice xmlns:p14="http://schemas.microsoft.com/office/powerpoint/2010/main" Requires="p14">
+  <mc:AlternateContent xmlns:mc="http://schemas.openxmlformats.org/markup-compatibility/2006" xmlns:p14="http://schemas.microsoft.com/office/powerpoint/2010/main">
+    <mc:Choice Requires="p14">
       <p:transition spd="slow" p14:dur="1600">
         <p14:prism isInverted="1"/>
       </p:transition>
     </mc:Choice>
-    <mc:Fallback>
+    <mc:Fallback xmlns="">
       <p:transition spd="slow">
         <p:fade/>
       </p:transition>
@@ -11049,13 +10966,13 @@
   <p:clrMapOvr>
     <a:masterClrMapping/>
   </p:clrMapOvr>
-  <mc:AlternateContent xmlns:mc="http://schemas.openxmlformats.org/markup-compatibility/2006">
-    <mc:Choice xmlns:p14="http://schemas.microsoft.com/office/powerpoint/2010/main" Requires="p14">
+  <mc:AlternateContent xmlns:mc="http://schemas.openxmlformats.org/markup-compatibility/2006" xmlns:p14="http://schemas.microsoft.com/office/powerpoint/2010/main">
+    <mc:Choice Requires="p14">
       <p:transition spd="slow" p14:dur="1600">
         <p14:prism isInverted="1"/>
       </p:transition>
     </mc:Choice>
-    <mc:Fallback>
+    <mc:Fallback xmlns="">
       <p:transition spd="slow">
         <p:fade/>
       </p:transition>
